--- a/cs701/slides/week-04.pptx
+++ b/cs701/slides/week-04.pptx
@@ -6392,7 +6392,7 @@
                   <a:srgbClr val="01AEFD"/>
                 </a:solidFill>
               </a:rPr>
-              <a:t>Type this into DayOfWeek.java   -   line 1</a:t>
+              <a:t>Make a new file, DayOfWeek.java, and type this in   -   line 1</a:t>
             </a:r>
           </a:p>
         </p:txBody>
@@ -6663,7 +6663,7 @@
                   <a:srgbClr val="DCECEF"/>
                 </a:solidFill>
               </a:rPr>
-              <a:t>Opens the class. Its name must be the file's name without .java - DayOfWeek lives in DayOfWeek.java - and every other line goes inside its braces.</a:t>
+              <a:t>Opens the class: DayOfWeek, the file's name without .java.</a:t>
             </a:r>
           </a:p>
         </p:txBody>
@@ -12368,7 +12368,7 @@
                   <a:srgbClr val="01AEFD"/>
                 </a:solidFill>
               </a:rPr>
-              <a:t>Type this into MonthName.java   -   line 1</a:t>
+              <a:t>Make a new file, MonthName.java, and type this in   -   line 1</a:t>
             </a:r>
           </a:p>
         </p:txBody>
@@ -12799,7 +12799,7 @@
                   <a:srgbClr val="DCECEF"/>
                 </a:solidFill>
               </a:rPr>
-              <a:t>Opens the class. Its name must be the file's name without .java - MonthName lives in MonthName.java - and every other line goes inside its braces.</a:t>
+              <a:t>Opens the class: MonthName, the file's name without .java.</a:t>
             </a:r>
           </a:p>
         </p:txBody>
@@ -19394,7 +19394,7 @@
                   <a:srgbClr val="01AEFD"/>
                 </a:solidFill>
               </a:rPr>
-              <a:t>Type this into Registration.java   -   line 11</a:t>
+              <a:t>Type this into last week’s Registration.java   -   line 11</a:t>
             </a:r>
           </a:p>
         </p:txBody>
@@ -19911,7 +19911,7 @@
                   <a:srgbClr val="01AEFD"/>
                 </a:solidFill>
               </a:rPr>
-              <a:t>Type this into BetterRegistration.java   -   line 1</a:t>
+              <a:t>Make a new file, BetterRegistration.java, and type this in   -   line 1</a:t>
             </a:r>
           </a:p>
         </p:txBody>
@@ -20182,7 +20182,7 @@
                   <a:srgbClr val="DCECEF"/>
                 </a:solidFill>
               </a:rPr>
-              <a:t>Opens the class. Its name must be the file's name without .java - BetterRegistration lives in BetterRegistration.java - and every other line goes inside its braces.</a:t>
+              <a:t>Opens the class: BetterRegistration, the file's name without .java.</a:t>
             </a:r>
           </a:p>
         </p:txBody>
